--- a/pokemon-card-playsheet.pptx
+++ b/pokemon-card-playsheet.pptx
@@ -1468,7 +1468,7 @@
         </p:nvSpPr>
         <p:spPr>
           <a:xfrm>
-            <a:off x="274320" y="4174236"/>
+            <a:off x="2647188" y="4174236"/>
             <a:ext cx="2267712" cy="3168396"/>
           </a:xfrm>
           <a:prstGeom prst="roundRect">
@@ -1495,7 +1495,7 @@
         </p:nvSpPr>
         <p:spPr>
           <a:xfrm>
-            <a:off x="365760" y="4265676"/>
+            <a:off x="2738628" y="4265676"/>
             <a:ext cx="2084832" cy="310896"/>
           </a:xfrm>
           <a:prstGeom prst="roundRect">
@@ -1522,7 +1522,7 @@
         </p:nvSpPr>
         <p:spPr>
           <a:xfrm>
-            <a:off x="365760" y="4265676"/>
+            <a:off x="2738628" y="4265676"/>
             <a:ext cx="2084832" cy="310896"/>
           </a:xfrm>
           <a:prstGeom prst="rect">
@@ -1561,7 +1561,7 @@
         </p:nvSpPr>
         <p:spPr>
           <a:xfrm>
-            <a:off x="402336" y="4649724"/>
+            <a:off x="2775204" y="4649724"/>
             <a:ext cx="2011680" cy="566928"/>
           </a:xfrm>
           <a:prstGeom prst="rect">
@@ -1617,7 +1617,7 @@
         </p:nvSpPr>
         <p:spPr>
           <a:xfrm>
-            <a:off x="2647188" y="4174236"/>
+            <a:off x="274320" y="4174236"/>
             <a:ext cx="2267712" cy="3168396"/>
           </a:xfrm>
           <a:prstGeom prst="roundRect">
@@ -1644,7 +1644,7 @@
         </p:nvSpPr>
         <p:spPr>
           <a:xfrm>
-            <a:off x="2738628" y="4265676"/>
+            <a:off x="365760" y="4265676"/>
             <a:ext cx="2084832" cy="310896"/>
           </a:xfrm>
           <a:prstGeom prst="roundRect">
@@ -1671,7 +1671,7 @@
         </p:nvSpPr>
         <p:spPr>
           <a:xfrm>
-            <a:off x="2738628" y="4265676"/>
+            <a:off x="365760" y="4265676"/>
             <a:ext cx="2084832" cy="310896"/>
           </a:xfrm>
           <a:prstGeom prst="rect">
@@ -1710,7 +1710,7 @@
         </p:nvSpPr>
         <p:spPr>
           <a:xfrm>
-            <a:off x="2775204" y="4649724"/>
+            <a:off x="402336" y="4649724"/>
             <a:ext cx="2011680" cy="566928"/>
           </a:xfrm>
           <a:prstGeom prst="rect">

--- a/pokemon-card-playsheet.pptx
+++ b/pokemon-card-playsheet.pptx
@@ -1072,7 +1072,7 @@
         </p:nvSpPr>
         <p:spPr>
           <a:xfrm>
-            <a:off x="274320" y="932688"/>
+            <a:off x="274320" y="7415784"/>
             <a:ext cx="2267712" cy="3168396"/>
           </a:xfrm>
           <a:prstGeom prst="roundRect">
@@ -1099,7 +1099,7 @@
         </p:nvSpPr>
         <p:spPr>
           <a:xfrm>
-            <a:off x="365760" y="1024128"/>
+            <a:off x="365760" y="7507224"/>
             <a:ext cx="2084832" cy="310896"/>
           </a:xfrm>
           <a:prstGeom prst="roundRect">
@@ -1126,7 +1126,7 @@
         </p:nvSpPr>
         <p:spPr>
           <a:xfrm>
-            <a:off x="365760" y="1024128"/>
+            <a:off x="365760" y="7507224"/>
             <a:ext cx="2084832" cy="310896"/>
           </a:xfrm>
           <a:prstGeom prst="rect">
@@ -1165,7 +1165,7 @@
         </p:nvSpPr>
         <p:spPr>
           <a:xfrm>
-            <a:off x="402336" y="1408176"/>
+            <a:off x="402336" y="7891272"/>
             <a:ext cx="2011680" cy="566928"/>
           </a:xfrm>
           <a:prstGeom prst="rect">
@@ -1204,7 +1204,7 @@
         </p:nvSpPr>
         <p:spPr>
           <a:xfrm>
-            <a:off x="2647188" y="932688"/>
+            <a:off x="2647188" y="7415784"/>
             <a:ext cx="2267712" cy="3168396"/>
           </a:xfrm>
           <a:prstGeom prst="roundRect">
@@ -1231,7 +1231,7 @@
         </p:nvSpPr>
         <p:spPr>
           <a:xfrm>
-            <a:off x="2738628" y="1024128"/>
+            <a:off x="2738628" y="7507224"/>
             <a:ext cx="2084832" cy="310896"/>
           </a:xfrm>
           <a:prstGeom prst="roundRect">
@@ -1258,7 +1258,7 @@
         </p:nvSpPr>
         <p:spPr>
           <a:xfrm>
-            <a:off x="2738628" y="1024128"/>
+            <a:off x="2738628" y="7507224"/>
             <a:ext cx="2084832" cy="310896"/>
           </a:xfrm>
           <a:prstGeom prst="rect">
@@ -1297,7 +1297,7 @@
         </p:nvSpPr>
         <p:spPr>
           <a:xfrm>
-            <a:off x="2775204" y="1408176"/>
+            <a:off x="2775204" y="7891272"/>
             <a:ext cx="2011680" cy="566928"/>
           </a:xfrm>
           <a:prstGeom prst="rect">
@@ -1336,7 +1336,7 @@
         </p:nvSpPr>
         <p:spPr>
           <a:xfrm>
-            <a:off x="5020056" y="932688"/>
+            <a:off x="5020056" y="7415784"/>
             <a:ext cx="2267712" cy="3168396"/>
           </a:xfrm>
           <a:prstGeom prst="roundRect">
@@ -1363,7 +1363,7 @@
         </p:nvSpPr>
         <p:spPr>
           <a:xfrm>
-            <a:off x="5111496" y="1024128"/>
+            <a:off x="5111496" y="7507224"/>
             <a:ext cx="2084832" cy="310896"/>
           </a:xfrm>
           <a:prstGeom prst="roundRect">
@@ -1390,7 +1390,7 @@
         </p:nvSpPr>
         <p:spPr>
           <a:xfrm>
-            <a:off x="5111496" y="1024128"/>
+            <a:off x="5111496" y="7507224"/>
             <a:ext cx="2084832" cy="310896"/>
           </a:xfrm>
           <a:prstGeom prst="rect">
@@ -1429,7 +1429,7 @@
         </p:nvSpPr>
         <p:spPr>
           <a:xfrm>
-            <a:off x="5148072" y="1408176"/>
+            <a:off x="5148072" y="7891272"/>
             <a:ext cx="2011680" cy="566928"/>
           </a:xfrm>
           <a:prstGeom prst="rect">
@@ -1915,7 +1915,7 @@
         </p:nvSpPr>
         <p:spPr>
           <a:xfrm>
-            <a:off x="274320" y="7415784"/>
+            <a:off x="274320" y="932688"/>
             <a:ext cx="2267712" cy="3168396"/>
           </a:xfrm>
           <a:prstGeom prst="roundRect">
@@ -1942,7 +1942,7 @@
         </p:nvSpPr>
         <p:spPr>
           <a:xfrm>
-            <a:off x="365760" y="7507224"/>
+            <a:off x="365760" y="1024128"/>
             <a:ext cx="2084832" cy="310896"/>
           </a:xfrm>
           <a:prstGeom prst="roundRect">
@@ -1969,7 +1969,7 @@
         </p:nvSpPr>
         <p:spPr>
           <a:xfrm>
-            <a:off x="365760" y="7507224"/>
+            <a:off x="365760" y="1024128"/>
             <a:ext cx="2084832" cy="310896"/>
           </a:xfrm>
           <a:prstGeom prst="rect">
@@ -2008,7 +2008,7 @@
         </p:nvSpPr>
         <p:spPr>
           <a:xfrm>
-            <a:off x="402336" y="7891272"/>
+            <a:off x="402336" y="1408176"/>
             <a:ext cx="2011680" cy="566928"/>
           </a:xfrm>
           <a:prstGeom prst="rect">
@@ -2047,7 +2047,7 @@
         </p:nvSpPr>
         <p:spPr>
           <a:xfrm>
-            <a:off x="2647188" y="7415784"/>
+            <a:off x="2647188" y="932688"/>
             <a:ext cx="2267712" cy="3168396"/>
           </a:xfrm>
           <a:prstGeom prst="roundRect">
@@ -2074,7 +2074,7 @@
         </p:nvSpPr>
         <p:spPr>
           <a:xfrm>
-            <a:off x="2738628" y="7507224"/>
+            <a:off x="2738628" y="1024128"/>
             <a:ext cx="2084832" cy="310896"/>
           </a:xfrm>
           <a:prstGeom prst="roundRect">
@@ -2101,7 +2101,7 @@
         </p:nvSpPr>
         <p:spPr>
           <a:xfrm>
-            <a:off x="2738628" y="7507224"/>
+            <a:off x="2738628" y="1024128"/>
             <a:ext cx="2084832" cy="310896"/>
           </a:xfrm>
           <a:prstGeom prst="rect">
@@ -2140,7 +2140,7 @@
         </p:nvSpPr>
         <p:spPr>
           <a:xfrm>
-            <a:off x="2775204" y="7891272"/>
+            <a:off x="2775204" y="1408176"/>
             <a:ext cx="2011680" cy="566928"/>
           </a:xfrm>
           <a:prstGeom prst="rect">
@@ -2179,7 +2179,7 @@
         </p:nvSpPr>
         <p:spPr>
           <a:xfrm>
-            <a:off x="5020056" y="7415784"/>
+            <a:off x="5020056" y="932688"/>
             <a:ext cx="2267712" cy="3168396"/>
           </a:xfrm>
           <a:prstGeom prst="roundRect">
@@ -2206,7 +2206,7 @@
         </p:nvSpPr>
         <p:spPr>
           <a:xfrm>
-            <a:off x="5111496" y="7507224"/>
+            <a:off x="5111496" y="1024128"/>
             <a:ext cx="2084832" cy="310896"/>
           </a:xfrm>
           <a:prstGeom prst="roundRect">
@@ -2233,7 +2233,7 @@
         </p:nvSpPr>
         <p:spPr>
           <a:xfrm>
-            <a:off x="5111496" y="7507224"/>
+            <a:off x="5111496" y="1024128"/>
             <a:ext cx="2084832" cy="310896"/>
           </a:xfrm>
           <a:prstGeom prst="rect">
@@ -2272,7 +2272,7 @@
         </p:nvSpPr>
         <p:spPr>
           <a:xfrm>
-            <a:off x="5148072" y="7891272"/>
+            <a:off x="5148072" y="1408176"/>
             <a:ext cx="2011680" cy="566928"/>
           </a:xfrm>
           <a:prstGeom prst="rect">

--- a/pokemon-card-playsheet.pptx
+++ b/pokemon-card-playsheet.pptx
@@ -1617,7 +1617,7 @@
         </p:nvSpPr>
         <p:spPr>
           <a:xfrm>
-            <a:off x="274320" y="4174236"/>
+            <a:off x="5020056" y="4174236"/>
             <a:ext cx="2267712" cy="3168396"/>
           </a:xfrm>
           <a:prstGeom prst="roundRect">
@@ -1644,7 +1644,7 @@
         </p:nvSpPr>
         <p:spPr>
           <a:xfrm>
-            <a:off x="365760" y="4265676"/>
+            <a:off x="5111496" y="4265676"/>
             <a:ext cx="2084832" cy="310896"/>
           </a:xfrm>
           <a:prstGeom prst="roundRect">
@@ -1671,7 +1671,7 @@
         </p:nvSpPr>
         <p:spPr>
           <a:xfrm>
-            <a:off x="365760" y="4265676"/>
+            <a:off x="5111496" y="4265676"/>
             <a:ext cx="2084832" cy="310896"/>
           </a:xfrm>
           <a:prstGeom prst="rect">
@@ -1710,7 +1710,7 @@
         </p:nvSpPr>
         <p:spPr>
           <a:xfrm>
-            <a:off x="402336" y="4649724"/>
+            <a:off x="5148072" y="4649724"/>
             <a:ext cx="2011680" cy="566928"/>
           </a:xfrm>
           <a:prstGeom prst="rect">
@@ -1783,7 +1783,7 @@
         </p:nvSpPr>
         <p:spPr>
           <a:xfrm>
-            <a:off x="5020056" y="4174236"/>
+            <a:off x="274320" y="4174236"/>
             <a:ext cx="2267712" cy="3168396"/>
           </a:xfrm>
           <a:prstGeom prst="roundRect">
@@ -1810,7 +1810,7 @@
         </p:nvSpPr>
         <p:spPr>
           <a:xfrm>
-            <a:off x="5111496" y="4265676"/>
+            <a:off x="365760" y="4265676"/>
             <a:ext cx="2084832" cy="310896"/>
           </a:xfrm>
           <a:prstGeom prst="roundRect">
@@ -1837,7 +1837,7 @@
         </p:nvSpPr>
         <p:spPr>
           <a:xfrm>
-            <a:off x="5111496" y="4265676"/>
+            <a:off x="365760" y="4265676"/>
             <a:ext cx="2084832" cy="310896"/>
           </a:xfrm>
           <a:prstGeom prst="rect">
@@ -1862,7 +1862,7 @@
                 <a:ea typeface="Meiryo" pitchFamily="34" charset="-122"/>
                 <a:cs typeface="Meiryo" pitchFamily="34" charset="-120"/>
               </a:rPr>
-              <a:t>トラッシュ</a:t>
+              <a:t>トラッシュ（すて札）</a:t>
             </a:r>
             <a:endParaRPr lang="en-US" sz="1300" dirty="0"/>
           </a:p>
@@ -1876,7 +1876,7 @@
         </p:nvSpPr>
         <p:spPr>
           <a:xfrm>
-            <a:off x="5148072" y="4649724"/>
+            <a:off x="402336" y="4649724"/>
             <a:ext cx="2011680" cy="566928"/>
           </a:xfrm>
           <a:prstGeom prst="rect">
